--- a/DependencyInjectionCourse/Dependency Injection.pptx
+++ b/DependencyInjectionCourse/Dependency Injection.pptx
@@ -249,7 +249,7 @@
           <a:p>
             <a:fld id="{F4F8E5AF-1A3E-45D4-84AD-F7F901731C12}" type="datetimeFigureOut">
               <a:rPr lang="en-US" smtClean="0"/>
-              <a:t>2/26/2017</a:t>
+              <a:t>3/26/2017</a:t>
             </a:fld>
             <a:endParaRPr lang="en-US"/>
           </a:p>
@@ -419,7 +419,7 @@
           <a:p>
             <a:fld id="{F4F8E5AF-1A3E-45D4-84AD-F7F901731C12}" type="datetimeFigureOut">
               <a:rPr lang="en-US" smtClean="0"/>
-              <a:t>2/26/2017</a:t>
+              <a:t>3/26/2017</a:t>
             </a:fld>
             <a:endParaRPr lang="en-US"/>
           </a:p>
@@ -599,7 +599,7 @@
           <a:p>
             <a:fld id="{F4F8E5AF-1A3E-45D4-84AD-F7F901731C12}" type="datetimeFigureOut">
               <a:rPr lang="en-US" smtClean="0"/>
-              <a:t>2/26/2017</a:t>
+              <a:t>3/26/2017</a:t>
             </a:fld>
             <a:endParaRPr lang="en-US"/>
           </a:p>
@@ -769,7 +769,7 @@
           <a:p>
             <a:fld id="{F4F8E5AF-1A3E-45D4-84AD-F7F901731C12}" type="datetimeFigureOut">
               <a:rPr lang="en-US" smtClean="0"/>
-              <a:t>2/26/2017</a:t>
+              <a:t>3/26/2017</a:t>
             </a:fld>
             <a:endParaRPr lang="en-US"/>
           </a:p>
@@ -1015,7 +1015,7 @@
           <a:p>
             <a:fld id="{F4F8E5AF-1A3E-45D4-84AD-F7F901731C12}" type="datetimeFigureOut">
               <a:rPr lang="en-US" smtClean="0"/>
-              <a:t>2/26/2017</a:t>
+              <a:t>3/26/2017</a:t>
             </a:fld>
             <a:endParaRPr lang="en-US"/>
           </a:p>
@@ -1247,7 +1247,7 @@
           <a:p>
             <a:fld id="{F4F8E5AF-1A3E-45D4-84AD-F7F901731C12}" type="datetimeFigureOut">
               <a:rPr lang="en-US" smtClean="0"/>
-              <a:t>2/26/2017</a:t>
+              <a:t>3/26/2017</a:t>
             </a:fld>
             <a:endParaRPr lang="en-US"/>
           </a:p>
@@ -1614,7 +1614,7 @@
           <a:p>
             <a:fld id="{F4F8E5AF-1A3E-45D4-84AD-F7F901731C12}" type="datetimeFigureOut">
               <a:rPr lang="en-US" smtClean="0"/>
-              <a:t>2/26/2017</a:t>
+              <a:t>3/26/2017</a:t>
             </a:fld>
             <a:endParaRPr lang="en-US"/>
           </a:p>
@@ -1732,7 +1732,7 @@
           <a:p>
             <a:fld id="{F4F8E5AF-1A3E-45D4-84AD-F7F901731C12}" type="datetimeFigureOut">
               <a:rPr lang="en-US" smtClean="0"/>
-              <a:t>2/26/2017</a:t>
+              <a:t>3/26/2017</a:t>
             </a:fld>
             <a:endParaRPr lang="en-US"/>
           </a:p>
@@ -1827,7 +1827,7 @@
           <a:p>
             <a:fld id="{F4F8E5AF-1A3E-45D4-84AD-F7F901731C12}" type="datetimeFigureOut">
               <a:rPr lang="en-US" smtClean="0"/>
-              <a:t>2/26/2017</a:t>
+              <a:t>3/26/2017</a:t>
             </a:fld>
             <a:endParaRPr lang="en-US"/>
           </a:p>
@@ -2104,7 +2104,7 @@
           <a:p>
             <a:fld id="{F4F8E5AF-1A3E-45D4-84AD-F7F901731C12}" type="datetimeFigureOut">
               <a:rPr lang="en-US" smtClean="0"/>
-              <a:t>2/26/2017</a:t>
+              <a:t>3/26/2017</a:t>
             </a:fld>
             <a:endParaRPr lang="en-US"/>
           </a:p>
@@ -2357,7 +2357,7 @@
           <a:p>
             <a:fld id="{F4F8E5AF-1A3E-45D4-84AD-F7F901731C12}" type="datetimeFigureOut">
               <a:rPr lang="en-US" smtClean="0"/>
-              <a:t>2/26/2017</a:t>
+              <a:t>3/26/2017</a:t>
             </a:fld>
             <a:endParaRPr lang="en-US"/>
           </a:p>
@@ -2570,7 +2570,7 @@
           <a:p>
             <a:fld id="{F4F8E5AF-1A3E-45D4-84AD-F7F901731C12}" type="datetimeFigureOut">
               <a:rPr lang="en-US" smtClean="0"/>
-              <a:t>2/26/2017</a:t>
+              <a:t>3/26/2017</a:t>
             </a:fld>
             <a:endParaRPr lang="en-US"/>
           </a:p>
@@ -3489,7 +3489,31 @@
             </a:r>
             <a:r>
               <a:rPr lang="en-US" dirty="0" smtClean="0"/>
-              <a:t>.</a:t>
+              <a:t>.(runtime </a:t>
+            </a:r>
+            <a:r>
+              <a:rPr lang="en-US" dirty="0" err="1" smtClean="0"/>
+              <a:t>esnasında</a:t>
+            </a:r>
+            <a:r>
+              <a:rPr lang="en-US" dirty="0" smtClean="0"/>
+              <a:t> </a:t>
+            </a:r>
+            <a:r>
+              <a:rPr lang="en-US" dirty="0" err="1" smtClean="0"/>
+              <a:t>impl</a:t>
+            </a:r>
+            <a:r>
+              <a:rPr lang="en-US" dirty="0" smtClean="0"/>
+              <a:t>. </a:t>
+            </a:r>
+            <a:r>
+              <a:rPr lang="en-US" dirty="0" err="1" smtClean="0"/>
+              <a:t>değiştirme</a:t>
+            </a:r>
+            <a:r>
+              <a:rPr lang="en-US" dirty="0" smtClean="0"/>
+              <a:t>)</a:t>
             </a:r>
             <a:endParaRPr lang="en-US" dirty="0"/>
           </a:p>
@@ -3566,7 +3590,15 @@
             </a:r>
             <a:r>
               <a:rPr lang="it-IT" dirty="0"/>
-              <a:t> a DI CONTAINER</a:t>
+              <a:t> a </a:t>
+            </a:r>
+            <a:r>
+              <a:rPr lang="it-IT"/>
+              <a:t>DI </a:t>
+            </a:r>
+            <a:r>
+              <a:rPr lang="it-IT" smtClean="0"/>
+              <a:t>CONTAINER (i.e poor man’s DI)</a:t>
             </a:r>
             <a:endParaRPr lang="en-US" dirty="0"/>
           </a:p>
